--- a/mermaid/20260618-email-automation/email-automation-demo-架構圖表合輯.pptx
+++ b/mermaid/20260618-email-automation/email-automation-demo-架構圖表合輯.pptx
@@ -3199,7 +3199,7 @@
                   <a:srgbClr val="FFFFFF"/>
                 </a:solidFill>
               </a:rPr>
-              <a:t>5 張圖表 ｜ 來源 docs/architecture.md ｜ 2026-06-18</a:t>
+              <a:t>5 張圖表 ｜ 含 LINE + Google Calendar 輸出 ｜ 2026-06-18</a:t>
             </a:r>
           </a:p>
         </p:txBody>
@@ -3289,8 +3289,8 @@
         </p:blipFill>
         <p:spPr>
           <a:xfrm>
-            <a:off x="605743" y="1005840"/>
-            <a:ext cx="10980207" cy="5532120"/>
+            <a:off x="714728" y="1005840"/>
+            <a:ext cx="10762238" cy="5532120"/>
           </a:xfrm>
           <a:prstGeom prst="rect">
             <a:avLst/>
@@ -3382,8 +3382,8 @@
         </p:blipFill>
         <p:spPr>
           <a:xfrm>
-            <a:off x="5049274" y="1005840"/>
-            <a:ext cx="2093147" cy="5532120"/>
+            <a:off x="5281775" y="1005840"/>
+            <a:ext cx="1628145" cy="5532120"/>
           </a:xfrm>
           <a:prstGeom prst="rect">
             <a:avLst/>
@@ -3475,8 +3475,8 @@
         </p:blipFill>
         <p:spPr>
           <a:xfrm>
-            <a:off x="320039" y="1244331"/>
-            <a:ext cx="11551615" cy="5055137"/>
+            <a:off x="320039" y="1461576"/>
+            <a:ext cx="11551615" cy="4620646"/>
           </a:xfrm>
           <a:prstGeom prst="rect">
             <a:avLst/>
@@ -3568,8 +3568,8 @@
         </p:blipFill>
         <p:spPr>
           <a:xfrm>
-            <a:off x="1189533" y="1005840"/>
-            <a:ext cx="9812629" cy="5532120"/>
+            <a:off x="1452183" y="1005840"/>
+            <a:ext cx="9287327" cy="5532120"/>
           </a:xfrm>
           <a:prstGeom prst="rect">
             <a:avLst/>
@@ -3661,8 +3661,8 @@
         </p:blipFill>
         <p:spPr>
           <a:xfrm>
-            <a:off x="4522732" y="1005840"/>
-            <a:ext cx="3146229" cy="5532120"/>
+            <a:off x="4276953" y="1005840"/>
+            <a:ext cx="3637787" cy="5532120"/>
           </a:xfrm>
           <a:prstGeom prst="rect">
             <a:avLst/>
